--- a/Use Case Submission - Good vs Bad.pptx
+++ b/Use Case Submission - Good vs Bad.pptx
@@ -502,7 +502,7 @@
           <a:p>
             <a:r>
               <a:rPr lang="en-US" dirty="0"/>
-              <a:t>Teaching point: same use case, two submissions. Left is what we often get — vague, one-word, nothing anyone can reuse. Right is what makes a submission valuable: specific problem, clear description of what AI did, a real (lightweight) impact number, and the actual reusable prompt so a teammate can copy it. Three things to remember: specific, honest about inputs (never paste confidential data), and reusable by someone who wasn't in the room. Ask the room: which one could you hand to a colleague and have them repeat it tomorrow?</a:t>
+              <a:t>Same use case, filled two ways — mirrors every field of our real form. Left is what we usually get: vague, blanks, nothing reusable. Right is a complete, strong submission. Three things make the difference: specific, honest about inputs (never paste confidential data), reusable by someone who wasn't in the room. Ask: which one could a teammate repeat tomorrow?</a:t>
             </a:r>
             <a:endParaRPr lang="en-US" dirty="0"/>
           </a:p>
@@ -883,8 +883,8 @@
         </p:nvSpPr>
         <p:spPr>
           <a:xfrm>
-            <a:off x="457200" y="292608"/>
-            <a:ext cx="7315200" cy="274320"/>
+            <a:off x="365760" y="219456"/>
+            <a:ext cx="8229600" cy="256032"/>
           </a:xfrm>
           <a:prstGeom prst="rect">
             <a:avLst/>
@@ -908,7 +908,7 @@
                 <a:ea typeface="Arial" pitchFamily="34" charset="-122"/>
                 <a:cs typeface="Arial" pitchFamily="34" charset="-120"/>
               </a:rPr>
-              <a:t>AI USE CASE SUBMISSIONS</a:t>
+              <a:t>AI USE CASE SUBMISSION</a:t>
             </a:r>
             <a:endParaRPr lang="en-US" sz="1200" dirty="0"/>
           </a:p>
@@ -922,8 +922,8 @@
         </p:nvSpPr>
         <p:spPr>
           <a:xfrm>
-            <a:off x="457200" y="548640"/>
-            <a:ext cx="11247120" cy="566928"/>
+            <a:off x="365760" y="457200"/>
+            <a:ext cx="11430000" cy="457200"/>
           </a:xfrm>
           <a:prstGeom prst="rect">
             <a:avLst/>
@@ -939,7 +939,7 @@
               <a:buNone/>
             </a:pPr>
             <a:r>
-              <a:rPr lang="en-US" sz="2900" b="1" dirty="0">
+              <a:rPr lang="en-US" sz="2600" b="1" dirty="0">
                 <a:solidFill>
                   <a:srgbClr val="1F2733"/>
                 </a:solidFill>
@@ -947,65 +947,26 @@
                 <a:ea typeface="Arial" pitchFamily="34" charset="-122"/>
                 <a:cs typeface="Arial" pitchFamily="34" charset="-120"/>
               </a:rPr>
-              <a:t>Same use case. Two very different submissions.</a:t>
-            </a:r>
-            <a:endParaRPr lang="en-US" sz="2900" dirty="0"/>
-          </a:p>
-        </p:txBody>
-      </p:sp>
-      <p:sp>
-        <p:nvSpPr>
-          <p:cNvPr id="4" name="Text 2"/>
-          <p:cNvSpPr/>
-          <p:nvPr/>
-        </p:nvSpPr>
-        <p:spPr>
-          <a:xfrm>
-            <a:off x="457200" y="1152144"/>
-            <a:ext cx="11247120" cy="292608"/>
-          </a:xfrm>
-          <a:prstGeom prst="rect">
-            <a:avLst/>
-          </a:prstGeom>
-          <a:noFill/>
-          <a:ln/>
-        </p:spPr>
-        <p:txBody>
-          <a:bodyPr wrap="square" lIns="0" tIns="0" rIns="0" bIns="0" rtlCol="0" anchor="ctr"/>
-          <a:lstStyle/>
-          <a:p>
-            <a:pPr indent="0" marL="0">
-              <a:buNone/>
-            </a:pPr>
-            <a:r>
-              <a:rPr lang="en-US" sz="1300" dirty="0">
-                <a:solidFill>
-                  <a:srgbClr val="5E6A78"/>
-                </a:solidFill>
-                <a:latin typeface="Arial" pitchFamily="34" charset="0"/>
-                <a:ea typeface="Arial" pitchFamily="34" charset="-122"/>
-                <a:cs typeface="Arial" pitchFamily="34" charset="-120"/>
-              </a:rPr>
-              <a:t>What turns a submission into something a teammate can actually reuse.</a:t>
-            </a:r>
-            <a:endParaRPr lang="en-US" sz="1300" dirty="0"/>
-          </a:p>
-        </p:txBody>
-      </p:sp>
-      <p:sp>
-        <p:nvSpPr>
-          <p:cNvPr id="5" name="Shape 3"/>
-          <p:cNvSpPr/>
-          <p:nvPr/>
-        </p:nvSpPr>
-        <p:spPr>
-          <a:xfrm>
-            <a:off x="2743200" y="2084832"/>
-            <a:ext cx="4343400" cy="3675888"/>
+              <a:t>The same use case, filled two ways</a:t>
+            </a:r>
+            <a:endParaRPr lang="en-US" sz="2600" dirty="0"/>
+          </a:p>
+        </p:txBody>
+      </p:sp>
+      <p:sp>
+        <p:nvSpPr>
+          <p:cNvPr id="4" name="Shape 2"/>
+          <p:cNvSpPr/>
+          <p:nvPr/>
+        </p:nvSpPr>
+        <p:spPr>
+          <a:xfrm>
+            <a:off x="2286000" y="1627632"/>
+            <a:ext cx="4709160" cy="4206240"/>
           </a:xfrm>
           <a:prstGeom prst="roundRect">
             <a:avLst>
-              <a:gd name="adj" fmla="val 1990"/>
+              <a:gd name="adj" fmla="val 1304"/>
             </a:avLst>
           </a:prstGeom>
           <a:solidFill>
@@ -1021,18 +982,18 @@
       </p:sp>
       <p:sp>
         <p:nvSpPr>
-          <p:cNvPr id="6" name="Shape 4"/>
-          <p:cNvSpPr/>
-          <p:nvPr/>
-        </p:nvSpPr>
-        <p:spPr>
-          <a:xfrm>
-            <a:off x="7269480" y="2084832"/>
-            <a:ext cx="4343400" cy="3675888"/>
+          <p:cNvPr id="5" name="Shape 3"/>
+          <p:cNvSpPr/>
+          <p:nvPr/>
+        </p:nvSpPr>
+        <p:spPr>
+          <a:xfrm>
+            <a:off x="7086600" y="1627632"/>
+            <a:ext cx="4709160" cy="4206240"/>
           </a:xfrm>
           <a:prstGeom prst="roundRect">
             <a:avLst>
-              <a:gd name="adj" fmla="val 1990"/>
+              <a:gd name="adj" fmla="val 1304"/>
             </a:avLst>
           </a:prstGeom>
           <a:solidFill>
@@ -1048,14 +1009,53 @@
       </p:sp>
       <p:sp>
         <p:nvSpPr>
+          <p:cNvPr id="6" name="Text 4"/>
+          <p:cNvSpPr/>
+          <p:nvPr/>
+        </p:nvSpPr>
+        <p:spPr>
+          <a:xfrm>
+            <a:off x="2286000" y="1280160"/>
+            <a:ext cx="4709160" cy="310896"/>
+          </a:xfrm>
+          <a:prstGeom prst="rect">
+            <a:avLst/>
+          </a:prstGeom>
+          <a:noFill/>
+          <a:ln/>
+        </p:spPr>
+        <p:txBody>
+          <a:bodyPr wrap="square" lIns="0" tIns="0" rIns="0" bIns="0" rtlCol="0" anchor="ctr"/>
+          <a:lstStyle/>
+          <a:p>
+            <a:pPr algn="ctr" indent="0" marL="0">
+              <a:buNone/>
+            </a:pPr>
+            <a:r>
+              <a:rPr lang="en-US" sz="1300" b="1" dirty="0">
+                <a:solidFill>
+                  <a:srgbClr val="B91C1C"/>
+                </a:solidFill>
+                <a:latin typeface="Arial" pitchFamily="34" charset="0"/>
+                <a:ea typeface="Arial" pitchFamily="34" charset="-122"/>
+                <a:cs typeface="Arial" pitchFamily="34" charset="-120"/>
+              </a:rPr>
+              <a:t>✕  WEAK</a:t>
+            </a:r>
+            <a:endParaRPr lang="en-US" sz="1300" dirty="0"/>
+          </a:p>
+        </p:txBody>
+      </p:sp>
+      <p:sp>
+        <p:nvSpPr>
           <p:cNvPr id="7" name="Text 5"/>
           <p:cNvSpPr/>
           <p:nvPr/>
         </p:nvSpPr>
         <p:spPr>
           <a:xfrm>
-            <a:off x="2743200" y="1572768"/>
-            <a:ext cx="4343400" cy="384048"/>
+            <a:off x="7086600" y="1280160"/>
+            <a:ext cx="4709160" cy="310896"/>
           </a:xfrm>
           <a:prstGeom prst="rect">
             <a:avLst/>
@@ -1071,31 +1071,17 @@
               <a:buNone/>
             </a:pPr>
             <a:r>
-              <a:rPr lang="en-US" sz="1400" b="1" dirty="0">
-                <a:solidFill>
-                  <a:srgbClr val="B91C1C"/>
-                </a:solidFill>
-                <a:latin typeface="Arial" pitchFamily="34" charset="0"/>
-                <a:ea typeface="Arial" pitchFamily="34" charset="-122"/>
-                <a:cs typeface="Arial" pitchFamily="34" charset="-120"/>
-              </a:rPr>
-              <a:t>✕  </a:t>
-            </a:r>
-            <a:pPr algn="ctr" indent="0" marL="0">
-              <a:buNone/>
-            </a:pPr>
-            <a:r>
-              <a:rPr lang="en-US" sz="1400" b="1" dirty="0">
-                <a:solidFill>
-                  <a:srgbClr val="B91C1C"/>
-                </a:solidFill>
-                <a:latin typeface="Arial" pitchFamily="34" charset="0"/>
-                <a:ea typeface="Arial" pitchFamily="34" charset="-122"/>
-                <a:cs typeface="Arial" pitchFamily="34" charset="-120"/>
-              </a:rPr>
-              <a:t>WEAK SUBMISSION</a:t>
-            </a:r>
-            <a:endParaRPr lang="en-US" sz="1400" dirty="0"/>
+              <a:rPr lang="en-US" sz="1300" b="1" dirty="0">
+                <a:solidFill>
+                  <a:srgbClr val="15803D"/>
+                </a:solidFill>
+                <a:latin typeface="Arial" pitchFamily="34" charset="0"/>
+                <a:ea typeface="Arial" pitchFamily="34" charset="-122"/>
+                <a:cs typeface="Arial" pitchFamily="34" charset="-120"/>
+              </a:rPr>
+              <a:t>✓  STRONG</a:t>
+            </a:r>
+            <a:endParaRPr lang="en-US" sz="1300" dirty="0"/>
           </a:p>
         </p:txBody>
       </p:sp>
@@ -1107,48 +1093,34 @@
         </p:nvSpPr>
         <p:spPr>
           <a:xfrm>
-            <a:off x="7269480" y="1572768"/>
-            <a:ext cx="4343400" cy="384048"/>
-          </a:xfrm>
-          <a:prstGeom prst="rect">
-            <a:avLst/>
-          </a:prstGeom>
-          <a:noFill/>
-          <a:ln/>
-        </p:spPr>
-        <p:txBody>
-          <a:bodyPr wrap="square" lIns="0" tIns="0" rIns="0" bIns="0" rtlCol="0" anchor="ctr"/>
-          <a:lstStyle/>
-          <a:p>
-            <a:pPr algn="ctr" indent="0" marL="0">
-              <a:buNone/>
-            </a:pPr>
-            <a:r>
-              <a:rPr lang="en-US" sz="1400" b="1" dirty="0">
-                <a:solidFill>
-                  <a:srgbClr val="15803D"/>
-                </a:solidFill>
-                <a:latin typeface="Arial" pitchFamily="34" charset="0"/>
-                <a:ea typeface="Arial" pitchFamily="34" charset="-122"/>
-                <a:cs typeface="Arial" pitchFamily="34" charset="-120"/>
-              </a:rPr>
-              <a:t>✓  </a:t>
-            </a:r>
-            <a:pPr algn="ctr" indent="0" marL="0">
-              <a:buNone/>
-            </a:pPr>
-            <a:r>
-              <a:rPr lang="en-US" sz="1400" b="1" dirty="0">
-                <a:solidFill>
-                  <a:srgbClr val="15803D"/>
-                </a:solidFill>
-                <a:latin typeface="Arial" pitchFamily="34" charset="0"/>
-                <a:ea typeface="Arial" pitchFamily="34" charset="-122"/>
-                <a:cs typeface="Arial" pitchFamily="34" charset="-120"/>
-              </a:rPr>
-              <a:t>STRONG SUBMISSION</a:t>
-            </a:r>
-            <a:endParaRPr lang="en-US" sz="1400" dirty="0"/>
+            <a:off x="320040" y="1673352"/>
+            <a:ext cx="1847088" cy="318211"/>
+          </a:xfrm>
+          <a:prstGeom prst="rect">
+            <a:avLst/>
+          </a:prstGeom>
+          <a:noFill/>
+          <a:ln/>
+        </p:spPr>
+        <p:txBody>
+          <a:bodyPr wrap="square" lIns="0" tIns="0" rIns="0" bIns="0" rtlCol="0" anchor="ctr"/>
+          <a:lstStyle/>
+          <a:p>
+            <a:pPr algn="r" indent="0" marL="0">
+              <a:buNone/>
+            </a:pPr>
+            <a:r>
+              <a:rPr lang="en-US" sz="1050" b="1" dirty="0">
+                <a:solidFill>
+                  <a:srgbClr val="1F2733"/>
+                </a:solidFill>
+                <a:latin typeface="Arial" pitchFamily="34" charset="0"/>
+                <a:ea typeface="Arial" pitchFamily="34" charset="-122"/>
+                <a:cs typeface="Arial" pitchFamily="34" charset="-120"/>
+              </a:rPr>
+              <a:t>Use Case Title</a:t>
+            </a:r>
+            <a:endParaRPr lang="en-US" sz="1050" dirty="0"/>
           </a:p>
         </p:txBody>
       </p:sp>
@@ -1160,24 +1132,125 @@
         </p:nvSpPr>
         <p:spPr>
           <a:xfrm>
-            <a:off x="457200" y="2240280"/>
-            <a:ext cx="2148840" cy="457200"/>
-          </a:xfrm>
-          <a:prstGeom prst="rect">
-            <a:avLst/>
-          </a:prstGeom>
-          <a:noFill/>
-          <a:ln/>
-        </p:spPr>
-        <p:txBody>
-          <a:bodyPr wrap="square" lIns="0" tIns="0" rIns="0" bIns="0" rtlCol="0" anchor="t"/>
+            <a:off x="2395728" y="1673352"/>
+            <a:ext cx="4480560" cy="318211"/>
+          </a:xfrm>
+          <a:prstGeom prst="rect">
+            <a:avLst/>
+          </a:prstGeom>
+          <a:noFill/>
+          <a:ln/>
+        </p:spPr>
+        <p:txBody>
+          <a:bodyPr wrap="square" lIns="0" tIns="0" rIns="0" bIns="0" rtlCol="0" anchor="ctr"/>
+          <a:lstStyle/>
+          <a:p>
+            <a:pPr indent="0" marL="0">
+              <a:buNone/>
+            </a:pPr>
+            <a:r>
+              <a:rPr lang="en-US" sz="1050" i="1" dirty="0">
+                <a:solidFill>
+                  <a:srgbClr val="9A5B5B"/>
+                </a:solidFill>
+                <a:latin typeface="Arial" pitchFamily="34" charset="0"/>
+                <a:ea typeface="Arial" pitchFamily="34" charset="-122"/>
+                <a:cs typeface="Arial" pitchFamily="34" charset="-120"/>
+              </a:rPr>
+              <a:t>“AI use case”</a:t>
+            </a:r>
+            <a:endParaRPr lang="en-US" sz="1050" dirty="0"/>
+          </a:p>
+        </p:txBody>
+      </p:sp>
+      <p:sp>
+        <p:nvSpPr>
+          <p:cNvPr id="10" name="Text 8"/>
+          <p:cNvSpPr/>
+          <p:nvPr/>
+        </p:nvSpPr>
+        <p:spPr>
+          <a:xfrm>
+            <a:off x="7205472" y="1673352"/>
+            <a:ext cx="4480560" cy="318211"/>
+          </a:xfrm>
+          <a:prstGeom prst="rect">
+            <a:avLst/>
+          </a:prstGeom>
+          <a:noFill/>
+          <a:ln/>
+        </p:spPr>
+        <p:txBody>
+          <a:bodyPr wrap="square" lIns="0" tIns="0" rIns="0" bIns="0" rtlCol="0" anchor="ctr"/>
+          <a:lstStyle/>
+          <a:p>
+            <a:pPr indent="0" marL="0">
+              <a:buNone/>
+            </a:pPr>
+            <a:r>
+              <a:rPr lang="en-US" sz="1050" dirty="0">
+                <a:solidFill>
+                  <a:srgbClr val="1F2733"/>
+                </a:solidFill>
+                <a:latin typeface="Arial" pitchFamily="34" charset="0"/>
+                <a:ea typeface="Arial" pitchFamily="34" charset="-122"/>
+                <a:cs typeface="Arial" pitchFamily="34" charset="-120"/>
+              </a:rPr>
+              <a:t>Turn meeting notes into decisions + action items</a:t>
+            </a:r>
+            <a:endParaRPr lang="en-US" sz="1050" dirty="0"/>
+          </a:p>
+        </p:txBody>
+      </p:sp>
+      <p:sp>
+        <p:nvSpPr>
+          <p:cNvPr id="11" name="Shape 9"/>
+          <p:cNvSpPr/>
+          <p:nvPr/>
+        </p:nvSpPr>
+        <p:spPr>
+          <a:xfrm>
+            <a:off x="365760" y="1982419"/>
+            <a:ext cx="11430000" cy="0"/>
+          </a:xfrm>
+          <a:prstGeom prst="line">
+            <a:avLst/>
+          </a:prstGeom>
+          <a:noFill/>
+          <a:ln w="9525">
+            <a:solidFill>
+              <a:srgbClr val="EEF0F3"/>
+            </a:solidFill>
+            <a:prstDash val="solid"/>
+          </a:ln>
+        </p:spPr>
+      </p:sp>
+      <p:sp>
+        <p:nvSpPr>
+          <p:cNvPr id="12" name="Text 10"/>
+          <p:cNvSpPr/>
+          <p:nvPr/>
+        </p:nvSpPr>
+        <p:spPr>
+          <a:xfrm>
+            <a:off x="320040" y="1991563"/>
+            <a:ext cx="1847088" cy="318211"/>
+          </a:xfrm>
+          <a:prstGeom prst="rect">
+            <a:avLst/>
+          </a:prstGeom>
+          <a:noFill/>
+          <a:ln/>
+        </p:spPr>
+        <p:txBody>
+          <a:bodyPr wrap="square" lIns="0" tIns="0" rIns="0" bIns="0" rtlCol="0" anchor="ctr"/>
           <a:lstStyle/>
           <a:p>
             <a:pPr algn="r" indent="0" marL="0">
               <a:buNone/>
             </a:pPr>
             <a:r>
-              <a:rPr lang="en-US" sz="1250" b="1" dirty="0">
+              <a:rPr lang="en-US" sz="1050" b="1" dirty="0">
                 <a:solidFill>
                   <a:srgbClr val="1F2733"/>
                 </a:solidFill>
@@ -1185,38 +1258,38 @@
                 <a:ea typeface="Arial" pitchFamily="34" charset="-122"/>
                 <a:cs typeface="Arial" pitchFamily="34" charset="-120"/>
               </a:rPr>
-              <a:t>Use Case Title</a:t>
-            </a:r>
-            <a:endParaRPr lang="en-US" sz="1250" dirty="0"/>
-          </a:p>
-        </p:txBody>
-      </p:sp>
-      <p:sp>
-        <p:nvSpPr>
-          <p:cNvPr id="10" name="Text 8"/>
-          <p:cNvSpPr/>
-          <p:nvPr/>
-        </p:nvSpPr>
-        <p:spPr>
-          <a:xfrm>
-            <a:off x="2880360" y="2240280"/>
-            <a:ext cx="4069080" cy="457200"/>
-          </a:xfrm>
-          <a:prstGeom prst="rect">
-            <a:avLst/>
-          </a:prstGeom>
-          <a:noFill/>
-          <a:ln/>
-        </p:spPr>
-        <p:txBody>
-          <a:bodyPr wrap="square" lIns="0" tIns="0" rIns="0" bIns="0" rtlCol="0" anchor="t"/>
+              <a:t>Business Area</a:t>
+            </a:r>
+            <a:endParaRPr lang="en-US" sz="1050" dirty="0"/>
+          </a:p>
+        </p:txBody>
+      </p:sp>
+      <p:sp>
+        <p:nvSpPr>
+          <p:cNvPr id="13" name="Text 11"/>
+          <p:cNvSpPr/>
+          <p:nvPr/>
+        </p:nvSpPr>
+        <p:spPr>
+          <a:xfrm>
+            <a:off x="2395728" y="1991563"/>
+            <a:ext cx="4480560" cy="318211"/>
+          </a:xfrm>
+          <a:prstGeom prst="rect">
+            <a:avLst/>
+          </a:prstGeom>
+          <a:noFill/>
+          <a:ln/>
+        </p:spPr>
+        <p:txBody>
+          <a:bodyPr wrap="square" lIns="0" tIns="0" rIns="0" bIns="0" rtlCol="0" anchor="ctr"/>
           <a:lstStyle/>
           <a:p>
             <a:pPr indent="0" marL="0">
               <a:buNone/>
             </a:pPr>
             <a:r>
-              <a:rPr lang="en-US" sz="1200" i="1" dirty="0">
+              <a:rPr lang="en-US" sz="1050" i="1" dirty="0">
                 <a:solidFill>
                   <a:srgbClr val="9A5B5B"/>
                 </a:solidFill>
@@ -1224,38 +1297,38 @@
                 <a:ea typeface="Arial" pitchFamily="34" charset="-122"/>
                 <a:cs typeface="Arial" pitchFamily="34" charset="-120"/>
               </a:rPr>
-              <a:t>“AI use case”</a:t>
-            </a:r>
-            <a:endParaRPr lang="en-US" sz="1200" dirty="0"/>
-          </a:p>
-        </p:txBody>
-      </p:sp>
-      <p:sp>
-        <p:nvSpPr>
-          <p:cNvPr id="11" name="Text 9"/>
-          <p:cNvSpPr/>
-          <p:nvPr/>
-        </p:nvSpPr>
-        <p:spPr>
-          <a:xfrm>
-            <a:off x="7406640" y="2240280"/>
-            <a:ext cx="4069080" cy="457200"/>
-          </a:xfrm>
-          <a:prstGeom prst="rect">
-            <a:avLst/>
-          </a:prstGeom>
-          <a:noFill/>
-          <a:ln/>
-        </p:spPr>
-        <p:txBody>
-          <a:bodyPr wrap="square" lIns="0" tIns="0" rIns="0" bIns="0" rtlCol="0" anchor="t"/>
+              <a:t>(blank)</a:t>
+            </a:r>
+            <a:endParaRPr lang="en-US" sz="1050" dirty="0"/>
+          </a:p>
+        </p:txBody>
+      </p:sp>
+      <p:sp>
+        <p:nvSpPr>
+          <p:cNvPr id="14" name="Text 12"/>
+          <p:cNvSpPr/>
+          <p:nvPr/>
+        </p:nvSpPr>
+        <p:spPr>
+          <a:xfrm>
+            <a:off x="7205472" y="1991563"/>
+            <a:ext cx="4480560" cy="318211"/>
+          </a:xfrm>
+          <a:prstGeom prst="rect">
+            <a:avLst/>
+          </a:prstGeom>
+          <a:noFill/>
+          <a:ln/>
+        </p:spPr>
+        <p:txBody>
+          <a:bodyPr wrap="square" lIns="0" tIns="0" rIns="0" bIns="0" rtlCol="0" anchor="ctr"/>
           <a:lstStyle/>
           <a:p>
             <a:pPr indent="0" marL="0">
               <a:buNone/>
             </a:pPr>
             <a:r>
-              <a:rPr lang="en-US" sz="1200" dirty="0">
+              <a:rPr lang="en-US" sz="1050" dirty="0">
                 <a:solidFill>
                   <a:srgbClr val="1F2733"/>
                 </a:solidFill>
@@ -1263,38 +1336,61 @@
                 <a:ea typeface="Arial" pitchFamily="34" charset="-122"/>
                 <a:cs typeface="Arial" pitchFamily="34" charset="-120"/>
               </a:rPr>
-              <a:t>Turn meeting notes into decisions + action items</a:t>
-            </a:r>
-            <a:endParaRPr lang="en-US" sz="1200" dirty="0"/>
-          </a:p>
-        </p:txBody>
-      </p:sp>
-      <p:sp>
-        <p:nvSpPr>
-          <p:cNvPr id="12" name="Text 10"/>
-          <p:cNvSpPr/>
-          <p:nvPr/>
-        </p:nvSpPr>
-        <p:spPr>
-          <a:xfrm>
-            <a:off x="457200" y="2761488"/>
-            <a:ext cx="2148840" cy="713232"/>
-          </a:xfrm>
-          <a:prstGeom prst="rect">
-            <a:avLst/>
-          </a:prstGeom>
-          <a:noFill/>
-          <a:ln/>
-        </p:spPr>
-        <p:txBody>
-          <a:bodyPr wrap="square" lIns="0" tIns="0" rIns="0" bIns="0" rtlCol="0" anchor="t"/>
+              <a:t>Marketing Operations</a:t>
+            </a:r>
+            <a:endParaRPr lang="en-US" sz="1050" dirty="0"/>
+          </a:p>
+        </p:txBody>
+      </p:sp>
+      <p:sp>
+        <p:nvSpPr>
+          <p:cNvPr id="15" name="Shape 13"/>
+          <p:cNvSpPr/>
+          <p:nvPr/>
+        </p:nvSpPr>
+        <p:spPr>
+          <a:xfrm>
+            <a:off x="365760" y="2300630"/>
+            <a:ext cx="11430000" cy="0"/>
+          </a:xfrm>
+          <a:prstGeom prst="line">
+            <a:avLst/>
+          </a:prstGeom>
+          <a:noFill/>
+          <a:ln w="9525">
+            <a:solidFill>
+              <a:srgbClr val="EEF0F3"/>
+            </a:solidFill>
+            <a:prstDash val="solid"/>
+          </a:ln>
+        </p:spPr>
+      </p:sp>
+      <p:sp>
+        <p:nvSpPr>
+          <p:cNvPr id="16" name="Text 14"/>
+          <p:cNvSpPr/>
+          <p:nvPr/>
+        </p:nvSpPr>
+        <p:spPr>
+          <a:xfrm>
+            <a:off x="320040" y="2309774"/>
+            <a:ext cx="1847088" cy="318211"/>
+          </a:xfrm>
+          <a:prstGeom prst="rect">
+            <a:avLst/>
+          </a:prstGeom>
+          <a:noFill/>
+          <a:ln/>
+        </p:spPr>
+        <p:txBody>
+          <a:bodyPr wrap="square" lIns="0" tIns="0" rIns="0" bIns="0" rtlCol="0" anchor="ctr"/>
           <a:lstStyle/>
           <a:p>
             <a:pPr algn="r" indent="0" marL="0">
               <a:buNone/>
             </a:pPr>
             <a:r>
-              <a:rPr lang="en-US" sz="1250" b="1" dirty="0">
+              <a:rPr lang="en-US" sz="1050" b="1" dirty="0">
                 <a:solidFill>
                   <a:srgbClr val="1F2733"/>
                 </a:solidFill>
@@ -1302,16 +1398,139 @@
                 <a:ea typeface="Arial" pitchFamily="34" charset="-122"/>
                 <a:cs typeface="Arial" pitchFamily="34" charset="-120"/>
               </a:rPr>
-              <a:t>Problem /</a:t>
-            </a:r>
-            <a:endParaRPr lang="en-US" sz="1250" dirty="0"/>
-          </a:p>
+              <a:t>Submitted By</a:t>
+            </a:r>
+            <a:endParaRPr lang="en-US" sz="1050" dirty="0"/>
+          </a:p>
+        </p:txBody>
+      </p:sp>
+      <p:sp>
+        <p:nvSpPr>
+          <p:cNvPr id="17" name="Text 15"/>
+          <p:cNvSpPr/>
+          <p:nvPr/>
+        </p:nvSpPr>
+        <p:spPr>
+          <a:xfrm>
+            <a:off x="2395728" y="2309774"/>
+            <a:ext cx="4480560" cy="318211"/>
+          </a:xfrm>
+          <a:prstGeom prst="rect">
+            <a:avLst/>
+          </a:prstGeom>
+          <a:noFill/>
+          <a:ln/>
+        </p:spPr>
+        <p:txBody>
+          <a:bodyPr wrap="square" lIns="0" tIns="0" rIns="0" bIns="0" rtlCol="0" anchor="ctr"/>
+          <a:lstStyle/>
+          <a:p>
+            <a:pPr indent="0" marL="0">
+              <a:buNone/>
+            </a:pPr>
+            <a:r>
+              <a:rPr lang="en-US" sz="1050" i="1" dirty="0">
+                <a:solidFill>
+                  <a:srgbClr val="9A5B5B"/>
+                </a:solidFill>
+                <a:latin typeface="Arial" pitchFamily="34" charset="0"/>
+                <a:ea typeface="Arial" pitchFamily="34" charset="-122"/>
+                <a:cs typeface="Arial" pitchFamily="34" charset="-120"/>
+              </a:rPr>
+              <a:t>(blank)</a:t>
+            </a:r>
+            <a:endParaRPr lang="en-US" sz="1050" dirty="0"/>
+          </a:p>
+        </p:txBody>
+      </p:sp>
+      <p:sp>
+        <p:nvSpPr>
+          <p:cNvPr id="18" name="Text 16"/>
+          <p:cNvSpPr/>
+          <p:nvPr/>
+        </p:nvSpPr>
+        <p:spPr>
+          <a:xfrm>
+            <a:off x="7205472" y="2309774"/>
+            <a:ext cx="4480560" cy="318211"/>
+          </a:xfrm>
+          <a:prstGeom prst="rect">
+            <a:avLst/>
+          </a:prstGeom>
+          <a:noFill/>
+          <a:ln/>
+        </p:spPr>
+        <p:txBody>
+          <a:bodyPr wrap="square" lIns="0" tIns="0" rIns="0" bIns="0" rtlCol="0" anchor="ctr"/>
+          <a:lstStyle/>
+          <a:p>
+            <a:pPr indent="0" marL="0">
+              <a:buNone/>
+            </a:pPr>
+            <a:r>
+              <a:rPr lang="en-US" sz="1050" dirty="0">
+                <a:solidFill>
+                  <a:srgbClr val="1F2733"/>
+                </a:solidFill>
+                <a:latin typeface="Arial" pitchFamily="34" charset="0"/>
+                <a:ea typeface="Arial" pitchFamily="34" charset="-122"/>
+                <a:cs typeface="Arial" pitchFamily="34" charset="-120"/>
+              </a:rPr>
+              <a:t>Sam Carter, scarter@bjs.com</a:t>
+            </a:r>
+            <a:endParaRPr lang="en-US" sz="1050" dirty="0"/>
+          </a:p>
+        </p:txBody>
+      </p:sp>
+      <p:sp>
+        <p:nvSpPr>
+          <p:cNvPr id="19" name="Shape 17"/>
+          <p:cNvSpPr/>
+          <p:nvPr/>
+        </p:nvSpPr>
+        <p:spPr>
+          <a:xfrm>
+            <a:off x="365760" y="2618842"/>
+            <a:ext cx="11430000" cy="0"/>
+          </a:xfrm>
+          <a:prstGeom prst="line">
+            <a:avLst/>
+          </a:prstGeom>
+          <a:noFill/>
+          <a:ln w="9525">
+            <a:solidFill>
+              <a:srgbClr val="EEF0F3"/>
+            </a:solidFill>
+            <a:prstDash val="solid"/>
+          </a:ln>
+        </p:spPr>
+      </p:sp>
+      <p:sp>
+        <p:nvSpPr>
+          <p:cNvPr id="20" name="Text 18"/>
+          <p:cNvSpPr/>
+          <p:nvPr/>
+        </p:nvSpPr>
+        <p:spPr>
+          <a:xfrm>
+            <a:off x="320040" y="2627986"/>
+            <a:ext cx="1847088" cy="318211"/>
+          </a:xfrm>
+          <a:prstGeom prst="rect">
+            <a:avLst/>
+          </a:prstGeom>
+          <a:noFill/>
+          <a:ln/>
+        </p:spPr>
+        <p:txBody>
+          <a:bodyPr wrap="square" lIns="0" tIns="0" rIns="0" bIns="0" rtlCol="0" anchor="ctr"/>
+          <a:lstStyle/>
           <a:p>
             <a:pPr algn="r" indent="0" marL="0">
               <a:buNone/>
             </a:pPr>
             <a:r>
-              <a:rPr lang="en-US" sz="1250" b="1" dirty="0">
+              <a:rPr lang="en-US" sz="1050" b="1" dirty="0">
                 <a:solidFill>
                   <a:srgbClr val="1F2733"/>
                 </a:solidFill>
@@ -1319,38 +1538,38 @@
                 <a:ea typeface="Arial" pitchFamily="34" charset="-122"/>
                 <a:cs typeface="Arial" pitchFamily="34" charset="-120"/>
               </a:rPr>
-              <a:t>Opportunity</a:t>
-            </a:r>
-            <a:endParaRPr lang="en-US" sz="1250" dirty="0"/>
-          </a:p>
-        </p:txBody>
-      </p:sp>
-      <p:sp>
-        <p:nvSpPr>
-          <p:cNvPr id="13" name="Text 11"/>
-          <p:cNvSpPr/>
-          <p:nvPr/>
-        </p:nvSpPr>
-        <p:spPr>
-          <a:xfrm>
-            <a:off x="2880360" y="2761488"/>
-            <a:ext cx="4069080" cy="713232"/>
-          </a:xfrm>
-          <a:prstGeom prst="rect">
-            <a:avLst/>
-          </a:prstGeom>
-          <a:noFill/>
-          <a:ln/>
-        </p:spPr>
-        <p:txBody>
-          <a:bodyPr wrap="square" lIns="0" tIns="0" rIns="0" bIns="0" rtlCol="0" anchor="t"/>
+              <a:t>Problem / Opportunity</a:t>
+            </a:r>
+            <a:endParaRPr lang="en-US" sz="1050" dirty="0"/>
+          </a:p>
+        </p:txBody>
+      </p:sp>
+      <p:sp>
+        <p:nvSpPr>
+          <p:cNvPr id="21" name="Text 19"/>
+          <p:cNvSpPr/>
+          <p:nvPr/>
+        </p:nvSpPr>
+        <p:spPr>
+          <a:xfrm>
+            <a:off x="2395728" y="2627986"/>
+            <a:ext cx="4480560" cy="318211"/>
+          </a:xfrm>
+          <a:prstGeom prst="rect">
+            <a:avLst/>
+          </a:prstGeom>
+          <a:noFill/>
+          <a:ln/>
+        </p:spPr>
+        <p:txBody>
+          <a:bodyPr wrap="square" lIns="0" tIns="0" rIns="0" bIns="0" rtlCol="0" anchor="ctr"/>
           <a:lstStyle/>
           <a:p>
             <a:pPr indent="0" marL="0">
               <a:buNone/>
             </a:pPr>
             <a:r>
-              <a:rPr lang="en-US" sz="1200" i="1" dirty="0">
+              <a:rPr lang="en-US" sz="1050" i="1" dirty="0">
                 <a:solidFill>
                   <a:srgbClr val="9A5B5B"/>
                 </a:solidFill>
@@ -1358,38 +1577,38 @@
                 <a:ea typeface="Arial" pitchFamily="34" charset="-122"/>
                 <a:cs typeface="Arial" pitchFamily="34" charset="-120"/>
               </a:rPr>
-              <a:t>“Meetings take too long.”</a:t>
-            </a:r>
-            <a:endParaRPr lang="en-US" sz="1200" dirty="0"/>
-          </a:p>
-        </p:txBody>
-      </p:sp>
-      <p:sp>
-        <p:nvSpPr>
-          <p:cNvPr id="14" name="Text 12"/>
-          <p:cNvSpPr/>
-          <p:nvPr/>
-        </p:nvSpPr>
-        <p:spPr>
-          <a:xfrm>
-            <a:off x="7406640" y="2761488"/>
-            <a:ext cx="4069080" cy="713232"/>
-          </a:xfrm>
-          <a:prstGeom prst="rect">
-            <a:avLst/>
-          </a:prstGeom>
-          <a:noFill/>
-          <a:ln/>
-        </p:spPr>
-        <p:txBody>
-          <a:bodyPr wrap="square" lIns="0" tIns="0" rIns="0" bIns="0" rtlCol="0" anchor="t"/>
+              <a:t>“Meetings take too long”</a:t>
+            </a:r>
+            <a:endParaRPr lang="en-US" sz="1050" dirty="0"/>
+          </a:p>
+        </p:txBody>
+      </p:sp>
+      <p:sp>
+        <p:nvSpPr>
+          <p:cNvPr id="22" name="Text 20"/>
+          <p:cNvSpPr/>
+          <p:nvPr/>
+        </p:nvSpPr>
+        <p:spPr>
+          <a:xfrm>
+            <a:off x="7205472" y="2627986"/>
+            <a:ext cx="4480560" cy="318211"/>
+          </a:xfrm>
+          <a:prstGeom prst="rect">
+            <a:avLst/>
+          </a:prstGeom>
+          <a:noFill/>
+          <a:ln/>
+        </p:spPr>
+        <p:txBody>
+          <a:bodyPr wrap="square" lIns="0" tIns="0" rIns="0" bIns="0" rtlCol="0" anchor="ctr"/>
           <a:lstStyle/>
           <a:p>
             <a:pPr indent="0" marL="0">
               <a:buNone/>
             </a:pPr>
             <a:r>
-              <a:rPr lang="en-US" sz="1200" dirty="0">
+              <a:rPr lang="en-US" sz="1050" dirty="0">
                 <a:solidFill>
                   <a:srgbClr val="1F2733"/>
                 </a:solidFill>
@@ -1397,38 +1616,61 @@
                 <a:ea typeface="Arial" pitchFamily="34" charset="-122"/>
                 <a:cs typeface="Arial" pitchFamily="34" charset="-120"/>
               </a:rPr>
-              <a:t>Weekly syncs cost me ~45 min of write-up, and action items slipped.</a:t>
-            </a:r>
-            <a:endParaRPr lang="en-US" sz="1200" dirty="0"/>
-          </a:p>
-        </p:txBody>
-      </p:sp>
-      <p:sp>
-        <p:nvSpPr>
-          <p:cNvPr id="15" name="Text 13"/>
-          <p:cNvSpPr/>
-          <p:nvPr/>
-        </p:nvSpPr>
-        <p:spPr>
-          <a:xfrm>
-            <a:off x="457200" y="3520440"/>
-            <a:ext cx="2148840" cy="731520"/>
-          </a:xfrm>
-          <a:prstGeom prst="rect">
-            <a:avLst/>
-          </a:prstGeom>
-          <a:noFill/>
-          <a:ln/>
-        </p:spPr>
-        <p:txBody>
-          <a:bodyPr wrap="square" lIns="0" tIns="0" rIns="0" bIns="0" rtlCol="0" anchor="t"/>
+              <a:t>Weekly syncs cost ~45 min write-up; items slipped</a:t>
+            </a:r>
+            <a:endParaRPr lang="en-US" sz="1050" dirty="0"/>
+          </a:p>
+        </p:txBody>
+      </p:sp>
+      <p:sp>
+        <p:nvSpPr>
+          <p:cNvPr id="23" name="Shape 21"/>
+          <p:cNvSpPr/>
+          <p:nvPr/>
+        </p:nvSpPr>
+        <p:spPr>
+          <a:xfrm>
+            <a:off x="365760" y="2937053"/>
+            <a:ext cx="11430000" cy="0"/>
+          </a:xfrm>
+          <a:prstGeom prst="line">
+            <a:avLst/>
+          </a:prstGeom>
+          <a:noFill/>
+          <a:ln w="9525">
+            <a:solidFill>
+              <a:srgbClr val="EEF0F3"/>
+            </a:solidFill>
+            <a:prstDash val="solid"/>
+          </a:ln>
+        </p:spPr>
+      </p:sp>
+      <p:sp>
+        <p:nvSpPr>
+          <p:cNvPr id="24" name="Text 22"/>
+          <p:cNvSpPr/>
+          <p:nvPr/>
+        </p:nvSpPr>
+        <p:spPr>
+          <a:xfrm>
+            <a:off x="320040" y="2946197"/>
+            <a:ext cx="1847088" cy="318211"/>
+          </a:xfrm>
+          <a:prstGeom prst="rect">
+            <a:avLst/>
+          </a:prstGeom>
+          <a:noFill/>
+          <a:ln/>
+        </p:spPr>
+        <p:txBody>
+          <a:bodyPr wrap="square" lIns="0" tIns="0" rIns="0" bIns="0" rtlCol="0" anchor="ctr"/>
           <a:lstStyle/>
           <a:p>
             <a:pPr algn="r" indent="0" marL="0">
               <a:buNone/>
             </a:pPr>
             <a:r>
-              <a:rPr lang="en-US" sz="1250" b="1" dirty="0">
+              <a:rPr lang="en-US" sz="1050" b="1" dirty="0">
                 <a:solidFill>
                   <a:srgbClr val="1F2733"/>
                 </a:solidFill>
@@ -1438,36 +1680,36 @@
               </a:rPr>
               <a:t>What AI Did</a:t>
             </a:r>
-            <a:endParaRPr lang="en-US" sz="1250" dirty="0"/>
-          </a:p>
-        </p:txBody>
-      </p:sp>
-      <p:sp>
-        <p:nvSpPr>
-          <p:cNvPr id="16" name="Text 14"/>
-          <p:cNvSpPr/>
-          <p:nvPr/>
-        </p:nvSpPr>
-        <p:spPr>
-          <a:xfrm>
-            <a:off x="2880360" y="3520440"/>
-            <a:ext cx="4069080" cy="731520"/>
-          </a:xfrm>
-          <a:prstGeom prst="rect">
-            <a:avLst/>
-          </a:prstGeom>
-          <a:noFill/>
-          <a:ln/>
-        </p:spPr>
-        <p:txBody>
-          <a:bodyPr wrap="square" lIns="0" tIns="0" rIns="0" bIns="0" rtlCol="0" anchor="t"/>
+            <a:endParaRPr lang="en-US" sz="1050" dirty="0"/>
+          </a:p>
+        </p:txBody>
+      </p:sp>
+      <p:sp>
+        <p:nvSpPr>
+          <p:cNvPr id="25" name="Text 23"/>
+          <p:cNvSpPr/>
+          <p:nvPr/>
+        </p:nvSpPr>
+        <p:spPr>
+          <a:xfrm>
+            <a:off x="2395728" y="2946197"/>
+            <a:ext cx="4480560" cy="318211"/>
+          </a:xfrm>
+          <a:prstGeom prst="rect">
+            <a:avLst/>
+          </a:prstGeom>
+          <a:noFill/>
+          <a:ln/>
+        </p:spPr>
+        <p:txBody>
+          <a:bodyPr wrap="square" lIns="0" tIns="0" rIns="0" bIns="0" rtlCol="0" anchor="ctr"/>
           <a:lstStyle/>
           <a:p>
             <a:pPr indent="0" marL="0">
               <a:buNone/>
             </a:pPr>
             <a:r>
-              <a:rPr lang="en-US" sz="1200" i="1" dirty="0">
+              <a:rPr lang="en-US" sz="1050" i="1" dirty="0">
                 <a:solidFill>
                   <a:srgbClr val="9A5B5B"/>
                 </a:solidFill>
@@ -1475,38 +1717,38 @@
                 <a:ea typeface="Arial" pitchFamily="34" charset="-122"/>
                 <a:cs typeface="Arial" pitchFamily="34" charset="-120"/>
               </a:rPr>
-              <a:t>“Summarized stuff.”</a:t>
-            </a:r>
-            <a:endParaRPr lang="en-US" sz="1200" dirty="0"/>
-          </a:p>
-        </p:txBody>
-      </p:sp>
-      <p:sp>
-        <p:nvSpPr>
-          <p:cNvPr id="17" name="Text 15"/>
-          <p:cNvSpPr/>
-          <p:nvPr/>
-        </p:nvSpPr>
-        <p:spPr>
-          <a:xfrm>
-            <a:off x="7406640" y="3520440"/>
-            <a:ext cx="4069080" cy="731520"/>
-          </a:xfrm>
-          <a:prstGeom prst="rect">
-            <a:avLst/>
-          </a:prstGeom>
-          <a:noFill/>
-          <a:ln/>
-        </p:spPr>
-        <p:txBody>
-          <a:bodyPr wrap="square" lIns="0" tIns="0" rIns="0" bIns="0" rtlCol="0" anchor="t"/>
+              <a:t>“Summarized stuff”</a:t>
+            </a:r>
+            <a:endParaRPr lang="en-US" sz="1050" dirty="0"/>
+          </a:p>
+        </p:txBody>
+      </p:sp>
+      <p:sp>
+        <p:nvSpPr>
+          <p:cNvPr id="26" name="Text 24"/>
+          <p:cNvSpPr/>
+          <p:nvPr/>
+        </p:nvSpPr>
+        <p:spPr>
+          <a:xfrm>
+            <a:off x="7205472" y="2946197"/>
+            <a:ext cx="4480560" cy="318211"/>
+          </a:xfrm>
+          <a:prstGeom prst="rect">
+            <a:avLst/>
+          </a:prstGeom>
+          <a:noFill/>
+          <a:ln/>
+        </p:spPr>
+        <p:txBody>
+          <a:bodyPr wrap="square" lIns="0" tIns="0" rIns="0" bIns="0" rtlCol="0" anchor="ctr"/>
           <a:lstStyle/>
           <a:p>
             <a:pPr indent="0" marL="0">
               <a:buNone/>
             </a:pPr>
             <a:r>
-              <a:rPr lang="en-US" sz="1200" dirty="0">
+              <a:rPr lang="en-US" sz="1050" dirty="0">
                 <a:solidFill>
                   <a:srgbClr val="1F2733"/>
                 </a:solidFill>
@@ -1514,38 +1756,61 @@
                 <a:ea typeface="Arial" pitchFamily="34" charset="-122"/>
                 <a:cs typeface="Arial" pitchFamily="34" charset="-120"/>
               </a:rPr>
-              <a:t>Summarized the transcript into decisions, action items with owners, and open questions.</a:t>
-            </a:r>
-            <a:endParaRPr lang="en-US" sz="1200" dirty="0"/>
-          </a:p>
-        </p:txBody>
-      </p:sp>
-      <p:sp>
-        <p:nvSpPr>
-          <p:cNvPr id="18" name="Text 16"/>
-          <p:cNvSpPr/>
-          <p:nvPr/>
-        </p:nvSpPr>
-        <p:spPr>
-          <a:xfrm>
-            <a:off x="457200" y="4297680"/>
-            <a:ext cx="2148840" cy="548640"/>
-          </a:xfrm>
-          <a:prstGeom prst="rect">
-            <a:avLst/>
-          </a:prstGeom>
-          <a:noFill/>
-          <a:ln/>
-        </p:spPr>
-        <p:txBody>
-          <a:bodyPr wrap="square" lIns="0" tIns="0" rIns="0" bIns="0" rtlCol="0" anchor="t"/>
+              <a:t>Summarized transcript → decisions, actions, open Qs</a:t>
+            </a:r>
+            <a:endParaRPr lang="en-US" sz="1050" dirty="0"/>
+          </a:p>
+        </p:txBody>
+      </p:sp>
+      <p:sp>
+        <p:nvSpPr>
+          <p:cNvPr id="27" name="Shape 25"/>
+          <p:cNvSpPr/>
+          <p:nvPr/>
+        </p:nvSpPr>
+        <p:spPr>
+          <a:xfrm>
+            <a:off x="365760" y="3255264"/>
+            <a:ext cx="11430000" cy="0"/>
+          </a:xfrm>
+          <a:prstGeom prst="line">
+            <a:avLst/>
+          </a:prstGeom>
+          <a:noFill/>
+          <a:ln w="9525">
+            <a:solidFill>
+              <a:srgbClr val="EEF0F3"/>
+            </a:solidFill>
+            <a:prstDash val="solid"/>
+          </a:ln>
+        </p:spPr>
+      </p:sp>
+      <p:sp>
+        <p:nvSpPr>
+          <p:cNvPr id="28" name="Text 26"/>
+          <p:cNvSpPr/>
+          <p:nvPr/>
+        </p:nvSpPr>
+        <p:spPr>
+          <a:xfrm>
+            <a:off x="320040" y="3264408"/>
+            <a:ext cx="1847088" cy="318211"/>
+          </a:xfrm>
+          <a:prstGeom prst="rect">
+            <a:avLst/>
+          </a:prstGeom>
+          <a:noFill/>
+          <a:ln/>
+        </p:spPr>
+        <p:txBody>
+          <a:bodyPr wrap="square" lIns="0" tIns="0" rIns="0" bIns="0" rtlCol="0" anchor="ctr"/>
           <a:lstStyle/>
           <a:p>
             <a:pPr algn="r" indent="0" marL="0">
               <a:buNone/>
             </a:pPr>
             <a:r>
-              <a:rPr lang="en-US" sz="1250" b="1" dirty="0">
+              <a:rPr lang="en-US" sz="1050" b="1" dirty="0">
                 <a:solidFill>
                   <a:srgbClr val="1F2733"/>
                 </a:solidFill>
@@ -1553,38 +1818,598 @@
                 <a:ea typeface="Arial" pitchFamily="34" charset="-122"/>
                 <a:cs typeface="Arial" pitchFamily="34" charset="-120"/>
               </a:rPr>
+              <a:t>Tool Used</a:t>
+            </a:r>
+            <a:endParaRPr lang="en-US" sz="1050" dirty="0"/>
+          </a:p>
+        </p:txBody>
+      </p:sp>
+      <p:sp>
+        <p:nvSpPr>
+          <p:cNvPr id="29" name="Text 27"/>
+          <p:cNvSpPr/>
+          <p:nvPr/>
+        </p:nvSpPr>
+        <p:spPr>
+          <a:xfrm>
+            <a:off x="2395728" y="3264408"/>
+            <a:ext cx="4480560" cy="318211"/>
+          </a:xfrm>
+          <a:prstGeom prst="rect">
+            <a:avLst/>
+          </a:prstGeom>
+          <a:noFill/>
+          <a:ln/>
+        </p:spPr>
+        <p:txBody>
+          <a:bodyPr wrap="square" lIns="0" tIns="0" rIns="0" bIns="0" rtlCol="0" anchor="ctr"/>
+          <a:lstStyle/>
+          <a:p>
+            <a:pPr indent="0" marL="0">
+              <a:buNone/>
+            </a:pPr>
+            <a:r>
+              <a:rPr lang="en-US" sz="1050" i="1" dirty="0">
+                <a:solidFill>
+                  <a:srgbClr val="9A5B5B"/>
+                </a:solidFill>
+                <a:latin typeface="Arial" pitchFamily="34" charset="0"/>
+                <a:ea typeface="Arial" pitchFamily="34" charset="-122"/>
+                <a:cs typeface="Arial" pitchFamily="34" charset="-120"/>
+              </a:rPr>
+              <a:t>“AI”</a:t>
+            </a:r>
+            <a:endParaRPr lang="en-US" sz="1050" dirty="0"/>
+          </a:p>
+        </p:txBody>
+      </p:sp>
+      <p:sp>
+        <p:nvSpPr>
+          <p:cNvPr id="30" name="Text 28"/>
+          <p:cNvSpPr/>
+          <p:nvPr/>
+        </p:nvSpPr>
+        <p:spPr>
+          <a:xfrm>
+            <a:off x="7205472" y="3264408"/>
+            <a:ext cx="4480560" cy="318211"/>
+          </a:xfrm>
+          <a:prstGeom prst="rect">
+            <a:avLst/>
+          </a:prstGeom>
+          <a:noFill/>
+          <a:ln/>
+        </p:spPr>
+        <p:txBody>
+          <a:bodyPr wrap="square" lIns="0" tIns="0" rIns="0" bIns="0" rtlCol="0" anchor="ctr"/>
+          <a:lstStyle/>
+          <a:p>
+            <a:pPr indent="0" marL="0">
+              <a:buNone/>
+            </a:pPr>
+            <a:r>
+              <a:rPr lang="en-US" sz="1050" dirty="0">
+                <a:solidFill>
+                  <a:srgbClr val="1F2733"/>
+                </a:solidFill>
+                <a:latin typeface="Arial" pitchFamily="34" charset="0"/>
+                <a:ea typeface="Arial" pitchFamily="34" charset="-122"/>
+                <a:cs typeface="Arial" pitchFamily="34" charset="-120"/>
+              </a:rPr>
+              <a:t>Claude</a:t>
+            </a:r>
+            <a:endParaRPr lang="en-US" sz="1050" dirty="0"/>
+          </a:p>
+        </p:txBody>
+      </p:sp>
+      <p:sp>
+        <p:nvSpPr>
+          <p:cNvPr id="31" name="Shape 29"/>
+          <p:cNvSpPr/>
+          <p:nvPr/>
+        </p:nvSpPr>
+        <p:spPr>
+          <a:xfrm>
+            <a:off x="365760" y="3573475"/>
+            <a:ext cx="11430000" cy="0"/>
+          </a:xfrm>
+          <a:prstGeom prst="line">
+            <a:avLst/>
+          </a:prstGeom>
+          <a:noFill/>
+          <a:ln w="9525">
+            <a:solidFill>
+              <a:srgbClr val="EEF0F3"/>
+            </a:solidFill>
+            <a:prstDash val="solid"/>
+          </a:ln>
+        </p:spPr>
+      </p:sp>
+      <p:sp>
+        <p:nvSpPr>
+          <p:cNvPr id="32" name="Text 30"/>
+          <p:cNvSpPr/>
+          <p:nvPr/>
+        </p:nvSpPr>
+        <p:spPr>
+          <a:xfrm>
+            <a:off x="320040" y="3582619"/>
+            <a:ext cx="1847088" cy="318211"/>
+          </a:xfrm>
+          <a:prstGeom prst="rect">
+            <a:avLst/>
+          </a:prstGeom>
+          <a:noFill/>
+          <a:ln/>
+        </p:spPr>
+        <p:txBody>
+          <a:bodyPr wrap="square" lIns="0" tIns="0" rIns="0" bIns="0" rtlCol="0" anchor="ctr"/>
+          <a:lstStyle/>
+          <a:p>
+            <a:pPr algn="r" indent="0" marL="0">
+              <a:buNone/>
+            </a:pPr>
+            <a:r>
+              <a:rPr lang="en-US" sz="1050" b="1" dirty="0">
+                <a:solidFill>
+                  <a:srgbClr val="1F2733"/>
+                </a:solidFill>
+                <a:latin typeface="Arial" pitchFamily="34" charset="0"/>
+                <a:ea typeface="Arial" pitchFamily="34" charset="-122"/>
+                <a:cs typeface="Arial" pitchFamily="34" charset="-120"/>
+              </a:rPr>
+              <a:t>Use Case Category</a:t>
+            </a:r>
+            <a:endParaRPr lang="en-US" sz="1050" dirty="0"/>
+          </a:p>
+        </p:txBody>
+      </p:sp>
+      <p:sp>
+        <p:nvSpPr>
+          <p:cNvPr id="33" name="Text 31"/>
+          <p:cNvSpPr/>
+          <p:nvPr/>
+        </p:nvSpPr>
+        <p:spPr>
+          <a:xfrm>
+            <a:off x="2395728" y="3582619"/>
+            <a:ext cx="4480560" cy="318211"/>
+          </a:xfrm>
+          <a:prstGeom prst="rect">
+            <a:avLst/>
+          </a:prstGeom>
+          <a:noFill/>
+          <a:ln/>
+        </p:spPr>
+        <p:txBody>
+          <a:bodyPr wrap="square" lIns="0" tIns="0" rIns="0" bIns="0" rtlCol="0" anchor="ctr"/>
+          <a:lstStyle/>
+          <a:p>
+            <a:pPr indent="0" marL="0">
+              <a:buNone/>
+            </a:pPr>
+            <a:r>
+              <a:rPr lang="en-US" sz="1050" i="1" dirty="0">
+                <a:solidFill>
+                  <a:srgbClr val="9A5B5B"/>
+                </a:solidFill>
+                <a:latin typeface="Arial" pitchFamily="34" charset="0"/>
+                <a:ea typeface="Arial" pitchFamily="34" charset="-122"/>
+                <a:cs typeface="Arial" pitchFamily="34" charset="-120"/>
+              </a:rPr>
+              <a:t>(blank)</a:t>
+            </a:r>
+            <a:endParaRPr lang="en-US" sz="1050" dirty="0"/>
+          </a:p>
+        </p:txBody>
+      </p:sp>
+      <p:sp>
+        <p:nvSpPr>
+          <p:cNvPr id="34" name="Text 32"/>
+          <p:cNvSpPr/>
+          <p:nvPr/>
+        </p:nvSpPr>
+        <p:spPr>
+          <a:xfrm>
+            <a:off x="7205472" y="3582619"/>
+            <a:ext cx="4480560" cy="318211"/>
+          </a:xfrm>
+          <a:prstGeom prst="rect">
+            <a:avLst/>
+          </a:prstGeom>
+          <a:noFill/>
+          <a:ln/>
+        </p:spPr>
+        <p:txBody>
+          <a:bodyPr wrap="square" lIns="0" tIns="0" rIns="0" bIns="0" rtlCol="0" anchor="ctr"/>
+          <a:lstStyle/>
+          <a:p>
+            <a:pPr indent="0" marL="0">
+              <a:buNone/>
+            </a:pPr>
+            <a:r>
+              <a:rPr lang="en-US" sz="1050" dirty="0">
+                <a:solidFill>
+                  <a:srgbClr val="1F2733"/>
+                </a:solidFill>
+                <a:latin typeface="Arial" pitchFamily="34" charset="0"/>
+                <a:ea typeface="Arial" pitchFamily="34" charset="-122"/>
+                <a:cs typeface="Arial" pitchFamily="34" charset="-120"/>
+              </a:rPr>
+              <a:t>Summarizing meetings, documents, or research</a:t>
+            </a:r>
+            <a:endParaRPr lang="en-US" sz="1050" dirty="0"/>
+          </a:p>
+        </p:txBody>
+      </p:sp>
+      <p:sp>
+        <p:nvSpPr>
+          <p:cNvPr id="35" name="Shape 33"/>
+          <p:cNvSpPr/>
+          <p:nvPr/>
+        </p:nvSpPr>
+        <p:spPr>
+          <a:xfrm>
+            <a:off x="365760" y="3891686"/>
+            <a:ext cx="11430000" cy="0"/>
+          </a:xfrm>
+          <a:prstGeom prst="line">
+            <a:avLst/>
+          </a:prstGeom>
+          <a:noFill/>
+          <a:ln w="9525">
+            <a:solidFill>
+              <a:srgbClr val="EEF0F3"/>
+            </a:solidFill>
+            <a:prstDash val="solid"/>
+          </a:ln>
+        </p:spPr>
+      </p:sp>
+      <p:sp>
+        <p:nvSpPr>
+          <p:cNvPr id="36" name="Text 34"/>
+          <p:cNvSpPr/>
+          <p:nvPr/>
+        </p:nvSpPr>
+        <p:spPr>
+          <a:xfrm>
+            <a:off x="320040" y="3900830"/>
+            <a:ext cx="1847088" cy="318211"/>
+          </a:xfrm>
+          <a:prstGeom prst="rect">
+            <a:avLst/>
+          </a:prstGeom>
+          <a:noFill/>
+          <a:ln/>
+        </p:spPr>
+        <p:txBody>
+          <a:bodyPr wrap="square" lIns="0" tIns="0" rIns="0" bIns="0" rtlCol="0" anchor="ctr"/>
+          <a:lstStyle/>
+          <a:p>
+            <a:pPr algn="r" indent="0" marL="0">
+              <a:buNone/>
+            </a:pPr>
+            <a:r>
+              <a:rPr lang="en-US" sz="1050" b="1" dirty="0">
+                <a:solidFill>
+                  <a:srgbClr val="1F2733"/>
+                </a:solidFill>
+                <a:latin typeface="Arial" pitchFamily="34" charset="0"/>
+                <a:ea typeface="Arial" pitchFamily="34" charset="-122"/>
+                <a:cs typeface="Arial" pitchFamily="34" charset="-120"/>
+              </a:rPr>
+              <a:t>Inputs Used</a:t>
+            </a:r>
+            <a:endParaRPr lang="en-US" sz="1050" dirty="0"/>
+          </a:p>
+        </p:txBody>
+      </p:sp>
+      <p:sp>
+        <p:nvSpPr>
+          <p:cNvPr id="37" name="Text 35"/>
+          <p:cNvSpPr/>
+          <p:nvPr/>
+        </p:nvSpPr>
+        <p:spPr>
+          <a:xfrm>
+            <a:off x="2395728" y="3900830"/>
+            <a:ext cx="4480560" cy="318211"/>
+          </a:xfrm>
+          <a:prstGeom prst="rect">
+            <a:avLst/>
+          </a:prstGeom>
+          <a:noFill/>
+          <a:ln/>
+        </p:spPr>
+        <p:txBody>
+          <a:bodyPr wrap="square" lIns="0" tIns="0" rIns="0" bIns="0" rtlCol="0" anchor="ctr"/>
+          <a:lstStyle/>
+          <a:p>
+            <a:pPr indent="0" marL="0">
+              <a:buNone/>
+            </a:pPr>
+            <a:r>
+              <a:rPr lang="en-US" sz="1050" i="1" dirty="0">
+                <a:solidFill>
+                  <a:srgbClr val="9A5B5B"/>
+                </a:solidFill>
+                <a:latin typeface="Arial" pitchFamily="34" charset="0"/>
+                <a:ea typeface="Arial" pitchFamily="34" charset="-122"/>
+                <a:cs typeface="Arial" pitchFamily="34" charset="-120"/>
+              </a:rPr>
+              <a:t>“notes”</a:t>
+            </a:r>
+            <a:endParaRPr lang="en-US" sz="1050" dirty="0"/>
+          </a:p>
+        </p:txBody>
+      </p:sp>
+      <p:sp>
+        <p:nvSpPr>
+          <p:cNvPr id="38" name="Text 36"/>
+          <p:cNvSpPr/>
+          <p:nvPr/>
+        </p:nvSpPr>
+        <p:spPr>
+          <a:xfrm>
+            <a:off x="7205472" y="3900830"/>
+            <a:ext cx="4480560" cy="318211"/>
+          </a:xfrm>
+          <a:prstGeom prst="rect">
+            <a:avLst/>
+          </a:prstGeom>
+          <a:noFill/>
+          <a:ln/>
+        </p:spPr>
+        <p:txBody>
+          <a:bodyPr wrap="square" lIns="0" tIns="0" rIns="0" bIns="0" rtlCol="0" anchor="ctr"/>
+          <a:lstStyle/>
+          <a:p>
+            <a:pPr indent="0" marL="0">
+              <a:buNone/>
+            </a:pPr>
+            <a:r>
+              <a:rPr lang="en-US" sz="1050" dirty="0">
+                <a:solidFill>
+                  <a:srgbClr val="1F2733"/>
+                </a:solidFill>
+                <a:latin typeface="Arial" pitchFamily="34" charset="0"/>
+                <a:ea typeface="Arial" pitchFamily="34" charset="-122"/>
+                <a:cs typeface="Arial" pitchFamily="34" charset="-120"/>
+              </a:rPr>
+              <a:t>Meeting transcript. No member / confidential data</a:t>
+            </a:r>
+            <a:endParaRPr lang="en-US" sz="1050" dirty="0"/>
+          </a:p>
+        </p:txBody>
+      </p:sp>
+      <p:sp>
+        <p:nvSpPr>
+          <p:cNvPr id="39" name="Shape 37"/>
+          <p:cNvSpPr/>
+          <p:nvPr/>
+        </p:nvSpPr>
+        <p:spPr>
+          <a:xfrm>
+            <a:off x="365760" y="4209898"/>
+            <a:ext cx="11430000" cy="0"/>
+          </a:xfrm>
+          <a:prstGeom prst="line">
+            <a:avLst/>
+          </a:prstGeom>
+          <a:noFill/>
+          <a:ln w="9525">
+            <a:solidFill>
+              <a:srgbClr val="EEF0F3"/>
+            </a:solidFill>
+            <a:prstDash val="solid"/>
+          </a:ln>
+        </p:spPr>
+      </p:sp>
+      <p:sp>
+        <p:nvSpPr>
+          <p:cNvPr id="40" name="Text 38"/>
+          <p:cNvSpPr/>
+          <p:nvPr/>
+        </p:nvSpPr>
+        <p:spPr>
+          <a:xfrm>
+            <a:off x="320040" y="4219042"/>
+            <a:ext cx="1847088" cy="318211"/>
+          </a:xfrm>
+          <a:prstGeom prst="rect">
+            <a:avLst/>
+          </a:prstGeom>
+          <a:noFill/>
+          <a:ln/>
+        </p:spPr>
+        <p:txBody>
+          <a:bodyPr wrap="square" lIns="0" tIns="0" rIns="0" bIns="0" rtlCol="0" anchor="ctr"/>
+          <a:lstStyle/>
+          <a:p>
+            <a:pPr algn="r" indent="0" marL="0">
+              <a:buNone/>
+            </a:pPr>
+            <a:r>
+              <a:rPr lang="en-US" sz="1050" b="1" dirty="0">
+                <a:solidFill>
+                  <a:srgbClr val="1F2733"/>
+                </a:solidFill>
+                <a:latin typeface="Arial" pitchFamily="34" charset="0"/>
+                <a:ea typeface="Arial" pitchFamily="34" charset="-122"/>
+                <a:cs typeface="Arial" pitchFamily="34" charset="-120"/>
+              </a:rPr>
+              <a:t>Output Created</a:t>
+            </a:r>
+            <a:endParaRPr lang="en-US" sz="1050" dirty="0"/>
+          </a:p>
+        </p:txBody>
+      </p:sp>
+      <p:sp>
+        <p:nvSpPr>
+          <p:cNvPr id="41" name="Text 39"/>
+          <p:cNvSpPr/>
+          <p:nvPr/>
+        </p:nvSpPr>
+        <p:spPr>
+          <a:xfrm>
+            <a:off x="2395728" y="4219042"/>
+            <a:ext cx="4480560" cy="318211"/>
+          </a:xfrm>
+          <a:prstGeom prst="rect">
+            <a:avLst/>
+          </a:prstGeom>
+          <a:noFill/>
+          <a:ln/>
+        </p:spPr>
+        <p:txBody>
+          <a:bodyPr wrap="square" lIns="0" tIns="0" rIns="0" bIns="0" rtlCol="0" anchor="ctr"/>
+          <a:lstStyle/>
+          <a:p>
+            <a:pPr indent="0" marL="0">
+              <a:buNone/>
+            </a:pPr>
+            <a:r>
+              <a:rPr lang="en-US" sz="1050" i="1" dirty="0">
+                <a:solidFill>
+                  <a:srgbClr val="9A5B5B"/>
+                </a:solidFill>
+                <a:latin typeface="Arial" pitchFamily="34" charset="0"/>
+                <a:ea typeface="Arial" pitchFamily="34" charset="-122"/>
+                <a:cs typeface="Arial" pitchFamily="34" charset="-120"/>
+              </a:rPr>
+              <a:t>“a summary”</a:t>
+            </a:r>
+            <a:endParaRPr lang="en-US" sz="1050" dirty="0"/>
+          </a:p>
+        </p:txBody>
+      </p:sp>
+      <p:sp>
+        <p:nvSpPr>
+          <p:cNvPr id="42" name="Text 40"/>
+          <p:cNvSpPr/>
+          <p:nvPr/>
+        </p:nvSpPr>
+        <p:spPr>
+          <a:xfrm>
+            <a:off x="7205472" y="4219042"/>
+            <a:ext cx="4480560" cy="318211"/>
+          </a:xfrm>
+          <a:prstGeom prst="rect">
+            <a:avLst/>
+          </a:prstGeom>
+          <a:noFill/>
+          <a:ln/>
+        </p:spPr>
+        <p:txBody>
+          <a:bodyPr wrap="square" lIns="0" tIns="0" rIns="0" bIns="0" rtlCol="0" anchor="ctr"/>
+          <a:lstStyle/>
+          <a:p>
+            <a:pPr indent="0" marL="0">
+              <a:buNone/>
+            </a:pPr>
+            <a:r>
+              <a:rPr lang="en-US" sz="1050" dirty="0">
+                <a:solidFill>
+                  <a:srgbClr val="1F2733"/>
+                </a:solidFill>
+                <a:latin typeface="Arial" pitchFamily="34" charset="0"/>
+                <a:ea typeface="Arial" pitchFamily="34" charset="-122"/>
+                <a:cs typeface="Arial" pitchFamily="34" charset="-120"/>
+              </a:rPr>
+              <a:t>½-page: 3 decisions, 6 actions w/ owners, 2 open Qs</a:t>
+            </a:r>
+            <a:endParaRPr lang="en-US" sz="1050" dirty="0"/>
+          </a:p>
+        </p:txBody>
+      </p:sp>
+      <p:sp>
+        <p:nvSpPr>
+          <p:cNvPr id="43" name="Shape 41"/>
+          <p:cNvSpPr/>
+          <p:nvPr/>
+        </p:nvSpPr>
+        <p:spPr>
+          <a:xfrm>
+            <a:off x="365760" y="4528109"/>
+            <a:ext cx="11430000" cy="0"/>
+          </a:xfrm>
+          <a:prstGeom prst="line">
+            <a:avLst/>
+          </a:prstGeom>
+          <a:noFill/>
+          <a:ln w="9525">
+            <a:solidFill>
+              <a:srgbClr val="EEF0F3"/>
+            </a:solidFill>
+            <a:prstDash val="solid"/>
+          </a:ln>
+        </p:spPr>
+      </p:sp>
+      <p:sp>
+        <p:nvSpPr>
+          <p:cNvPr id="44" name="Text 42"/>
+          <p:cNvSpPr/>
+          <p:nvPr/>
+        </p:nvSpPr>
+        <p:spPr>
+          <a:xfrm>
+            <a:off x="320040" y="4537253"/>
+            <a:ext cx="1847088" cy="318211"/>
+          </a:xfrm>
+          <a:prstGeom prst="rect">
+            <a:avLst/>
+          </a:prstGeom>
+          <a:noFill/>
+          <a:ln/>
+        </p:spPr>
+        <p:txBody>
+          <a:bodyPr wrap="square" lIns="0" tIns="0" rIns="0" bIns="0" rtlCol="0" anchor="ctr"/>
+          <a:lstStyle/>
+          <a:p>
+            <a:pPr algn="r" indent="0" marL="0">
+              <a:buNone/>
+            </a:pPr>
+            <a:r>
+              <a:rPr lang="en-US" sz="1050" b="1" dirty="0">
+                <a:solidFill>
+                  <a:srgbClr val="1F2733"/>
+                </a:solidFill>
+                <a:latin typeface="Arial" pitchFamily="34" charset="0"/>
+                <a:ea typeface="Arial" pitchFamily="34" charset="-122"/>
+                <a:cs typeface="Arial" pitchFamily="34" charset="-120"/>
+              </a:rPr>
               <a:t>Estimated Impact</a:t>
             </a:r>
-            <a:endParaRPr lang="en-US" sz="1250" dirty="0"/>
-          </a:p>
-        </p:txBody>
-      </p:sp>
-      <p:sp>
-        <p:nvSpPr>
-          <p:cNvPr id="19" name="Text 17"/>
-          <p:cNvSpPr/>
-          <p:nvPr/>
-        </p:nvSpPr>
-        <p:spPr>
-          <a:xfrm>
-            <a:off x="2880360" y="4297680"/>
-            <a:ext cx="4069080" cy="548640"/>
-          </a:xfrm>
-          <a:prstGeom prst="rect">
-            <a:avLst/>
-          </a:prstGeom>
-          <a:noFill/>
-          <a:ln/>
-        </p:spPr>
-        <p:txBody>
-          <a:bodyPr wrap="square" lIns="0" tIns="0" rIns="0" bIns="0" rtlCol="0" anchor="t"/>
+            <a:endParaRPr lang="en-US" sz="1050" dirty="0"/>
+          </a:p>
+        </p:txBody>
+      </p:sp>
+      <p:sp>
+        <p:nvSpPr>
+          <p:cNvPr id="45" name="Text 43"/>
+          <p:cNvSpPr/>
+          <p:nvPr/>
+        </p:nvSpPr>
+        <p:spPr>
+          <a:xfrm>
+            <a:off x="2395728" y="4537253"/>
+            <a:ext cx="4480560" cy="318211"/>
+          </a:xfrm>
+          <a:prstGeom prst="rect">
+            <a:avLst/>
+          </a:prstGeom>
+          <a:noFill/>
+          <a:ln/>
+        </p:spPr>
+        <p:txBody>
+          <a:bodyPr wrap="square" lIns="0" tIns="0" rIns="0" bIns="0" rtlCol="0" anchor="ctr"/>
           <a:lstStyle/>
           <a:p>
             <a:pPr indent="0" marL="0">
               <a:buNone/>
             </a:pPr>
             <a:r>
-              <a:rPr lang="en-US" sz="1200" i="1" dirty="0">
+              <a:rPr lang="en-US" sz="1050" i="1" dirty="0">
                 <a:solidFill>
                   <a:srgbClr val="9A5B5B"/>
                 </a:solidFill>
@@ -1592,38 +2417,38 @@
                 <a:ea typeface="Arial" pitchFamily="34" charset="-122"/>
                 <a:cs typeface="Arial" pitchFamily="34" charset="-120"/>
               </a:rPr>
-              <a:t>“Saved time.”</a:t>
-            </a:r>
-            <a:endParaRPr lang="en-US" sz="1200" dirty="0"/>
-          </a:p>
-        </p:txBody>
-      </p:sp>
-      <p:sp>
-        <p:nvSpPr>
-          <p:cNvPr id="20" name="Text 18"/>
-          <p:cNvSpPr/>
-          <p:nvPr/>
-        </p:nvSpPr>
-        <p:spPr>
-          <a:xfrm>
-            <a:off x="7406640" y="4297680"/>
-            <a:ext cx="4069080" cy="548640"/>
-          </a:xfrm>
-          <a:prstGeom prst="rect">
-            <a:avLst/>
-          </a:prstGeom>
-          <a:noFill/>
-          <a:ln/>
-        </p:spPr>
-        <p:txBody>
-          <a:bodyPr wrap="square" lIns="0" tIns="0" rIns="0" bIns="0" rtlCol="0" anchor="t"/>
+              <a:t>“saved time”</a:t>
+            </a:r>
+            <a:endParaRPr lang="en-US" sz="1050" dirty="0"/>
+          </a:p>
+        </p:txBody>
+      </p:sp>
+      <p:sp>
+        <p:nvSpPr>
+          <p:cNvPr id="46" name="Text 44"/>
+          <p:cNvSpPr/>
+          <p:nvPr/>
+        </p:nvSpPr>
+        <p:spPr>
+          <a:xfrm>
+            <a:off x="7205472" y="4537253"/>
+            <a:ext cx="4480560" cy="318211"/>
+          </a:xfrm>
+          <a:prstGeom prst="rect">
+            <a:avLst/>
+          </a:prstGeom>
+          <a:noFill/>
+          <a:ln/>
+        </p:spPr>
+        <p:txBody>
+          <a:bodyPr wrap="square" lIns="0" tIns="0" rIns="0" bIns="0" rtlCol="0" anchor="ctr"/>
           <a:lstStyle/>
           <a:p>
             <a:pPr indent="0" marL="0">
               <a:buNone/>
             </a:pPr>
             <a:r>
-              <a:rPr lang="en-US" sz="1200" dirty="0">
+              <a:rPr lang="en-US" sz="1050" dirty="0">
                 <a:solidFill>
                   <a:srgbClr val="1F2733"/>
                 </a:solidFill>
@@ -1631,38 +2456,61 @@
                 <a:ea typeface="Arial" pitchFamily="34" charset="-122"/>
                 <a:cs typeface="Arial" pitchFamily="34" charset="-120"/>
               </a:rPr>
-              <a:t>~40 min saved per meeting; fewer missed follow-ups.</a:t>
-            </a:r>
-            <a:endParaRPr lang="en-US" sz="1200" dirty="0"/>
-          </a:p>
-        </p:txBody>
-      </p:sp>
-      <p:sp>
-        <p:nvSpPr>
-          <p:cNvPr id="21" name="Text 19"/>
-          <p:cNvSpPr/>
-          <p:nvPr/>
-        </p:nvSpPr>
-        <p:spPr>
-          <a:xfrm>
-            <a:off x="457200" y="4846320"/>
-            <a:ext cx="2148840" cy="868680"/>
-          </a:xfrm>
-          <a:prstGeom prst="rect">
-            <a:avLst/>
-          </a:prstGeom>
-          <a:noFill/>
-          <a:ln/>
-        </p:spPr>
-        <p:txBody>
-          <a:bodyPr wrap="square" lIns="0" tIns="0" rIns="0" bIns="0" rtlCol="0" anchor="t"/>
+              <a:t>~40 min saved / meeting; fewer missed follow-ups</a:t>
+            </a:r>
+            <a:endParaRPr lang="en-US" sz="1050" dirty="0"/>
+          </a:p>
+        </p:txBody>
+      </p:sp>
+      <p:sp>
+        <p:nvSpPr>
+          <p:cNvPr id="47" name="Shape 45"/>
+          <p:cNvSpPr/>
+          <p:nvPr/>
+        </p:nvSpPr>
+        <p:spPr>
+          <a:xfrm>
+            <a:off x="365760" y="4846320"/>
+            <a:ext cx="11430000" cy="0"/>
+          </a:xfrm>
+          <a:prstGeom prst="line">
+            <a:avLst/>
+          </a:prstGeom>
+          <a:noFill/>
+          <a:ln w="9525">
+            <a:solidFill>
+              <a:srgbClr val="EEF0F3"/>
+            </a:solidFill>
+            <a:prstDash val="solid"/>
+          </a:ln>
+        </p:spPr>
+      </p:sp>
+      <p:sp>
+        <p:nvSpPr>
+          <p:cNvPr id="48" name="Text 46"/>
+          <p:cNvSpPr/>
+          <p:nvPr/>
+        </p:nvSpPr>
+        <p:spPr>
+          <a:xfrm>
+            <a:off x="320040" y="4855464"/>
+            <a:ext cx="1847088" cy="318211"/>
+          </a:xfrm>
+          <a:prstGeom prst="rect">
+            <a:avLst/>
+          </a:prstGeom>
+          <a:noFill/>
+          <a:ln/>
+        </p:spPr>
+        <p:txBody>
+          <a:bodyPr wrap="square" lIns="0" tIns="0" rIns="0" bIns="0" rtlCol="0" anchor="ctr"/>
           <a:lstStyle/>
           <a:p>
             <a:pPr algn="r" indent="0" marL="0">
               <a:buNone/>
             </a:pPr>
             <a:r>
-              <a:rPr lang="en-US" sz="1250" b="1" dirty="0">
+              <a:rPr lang="en-US" sz="1050" b="1" dirty="0">
                 <a:solidFill>
                   <a:srgbClr val="1F2733"/>
                 </a:solidFill>
@@ -1670,16 +2518,139 @@
                 <a:ea typeface="Arial" pitchFamily="34" charset="-122"/>
                 <a:cs typeface="Arial" pitchFamily="34" charset="-120"/>
               </a:rPr>
-              <a:t>Reusable Steps /</a:t>
-            </a:r>
-            <a:endParaRPr lang="en-US" sz="1250" dirty="0"/>
-          </a:p>
+              <a:t>Frequency of Use</a:t>
+            </a:r>
+            <a:endParaRPr lang="en-US" sz="1050" dirty="0"/>
+          </a:p>
+        </p:txBody>
+      </p:sp>
+      <p:sp>
+        <p:nvSpPr>
+          <p:cNvPr id="49" name="Text 47"/>
+          <p:cNvSpPr/>
+          <p:nvPr/>
+        </p:nvSpPr>
+        <p:spPr>
+          <a:xfrm>
+            <a:off x="2395728" y="4855464"/>
+            <a:ext cx="4480560" cy="318211"/>
+          </a:xfrm>
+          <a:prstGeom prst="rect">
+            <a:avLst/>
+          </a:prstGeom>
+          <a:noFill/>
+          <a:ln/>
+        </p:spPr>
+        <p:txBody>
+          <a:bodyPr wrap="square" lIns="0" tIns="0" rIns="0" bIns="0" rtlCol="0" anchor="ctr"/>
+          <a:lstStyle/>
+          <a:p>
+            <a:pPr indent="0" marL="0">
+              <a:buNone/>
+            </a:pPr>
+            <a:r>
+              <a:rPr lang="en-US" sz="1050" i="1" dirty="0">
+                <a:solidFill>
+                  <a:srgbClr val="9A5B5B"/>
+                </a:solidFill>
+                <a:latin typeface="Arial" pitchFamily="34" charset="0"/>
+                <a:ea typeface="Arial" pitchFamily="34" charset="-122"/>
+                <a:cs typeface="Arial" pitchFamily="34" charset="-120"/>
+              </a:rPr>
+              <a:t>“sometimes”</a:t>
+            </a:r>
+            <a:endParaRPr lang="en-US" sz="1050" dirty="0"/>
+          </a:p>
+        </p:txBody>
+      </p:sp>
+      <p:sp>
+        <p:nvSpPr>
+          <p:cNvPr id="50" name="Text 48"/>
+          <p:cNvSpPr/>
+          <p:nvPr/>
+        </p:nvSpPr>
+        <p:spPr>
+          <a:xfrm>
+            <a:off x="7205472" y="4855464"/>
+            <a:ext cx="4480560" cy="318211"/>
+          </a:xfrm>
+          <a:prstGeom prst="rect">
+            <a:avLst/>
+          </a:prstGeom>
+          <a:noFill/>
+          <a:ln/>
+        </p:spPr>
+        <p:txBody>
+          <a:bodyPr wrap="square" lIns="0" tIns="0" rIns="0" bIns="0" rtlCol="0" anchor="ctr"/>
+          <a:lstStyle/>
+          <a:p>
+            <a:pPr indent="0" marL="0">
+              <a:buNone/>
+            </a:pPr>
+            <a:r>
+              <a:rPr lang="en-US" sz="1050" dirty="0">
+                <a:solidFill>
+                  <a:srgbClr val="1F2733"/>
+                </a:solidFill>
+                <a:latin typeface="Arial" pitchFamily="34" charset="0"/>
+                <a:ea typeface="Arial" pitchFamily="34" charset="-122"/>
+                <a:cs typeface="Arial" pitchFamily="34" charset="-120"/>
+              </a:rPr>
+              <a:t>Weekly (every team sync)</a:t>
+            </a:r>
+            <a:endParaRPr lang="en-US" sz="1050" dirty="0"/>
+          </a:p>
+        </p:txBody>
+      </p:sp>
+      <p:sp>
+        <p:nvSpPr>
+          <p:cNvPr id="51" name="Shape 49"/>
+          <p:cNvSpPr/>
+          <p:nvPr/>
+        </p:nvSpPr>
+        <p:spPr>
+          <a:xfrm>
+            <a:off x="365760" y="5164531"/>
+            <a:ext cx="11430000" cy="0"/>
+          </a:xfrm>
+          <a:prstGeom prst="line">
+            <a:avLst/>
+          </a:prstGeom>
+          <a:noFill/>
+          <a:ln w="9525">
+            <a:solidFill>
+              <a:srgbClr val="EEF0F3"/>
+            </a:solidFill>
+            <a:prstDash val="solid"/>
+          </a:ln>
+        </p:spPr>
+      </p:sp>
+      <p:sp>
+        <p:nvSpPr>
+          <p:cNvPr id="52" name="Text 50"/>
+          <p:cNvSpPr/>
+          <p:nvPr/>
+        </p:nvSpPr>
+        <p:spPr>
+          <a:xfrm>
+            <a:off x="320040" y="5173675"/>
+            <a:ext cx="1847088" cy="318211"/>
+          </a:xfrm>
+          <a:prstGeom prst="rect">
+            <a:avLst/>
+          </a:prstGeom>
+          <a:noFill/>
+          <a:ln/>
+        </p:spPr>
+        <p:txBody>
+          <a:bodyPr wrap="square" lIns="0" tIns="0" rIns="0" bIns="0" rtlCol="0" anchor="ctr"/>
+          <a:lstStyle/>
           <a:p>
             <a:pPr algn="r" indent="0" marL="0">
               <a:buNone/>
             </a:pPr>
             <a:r>
-              <a:rPr lang="en-US" sz="1250" b="1" dirty="0">
+              <a:rPr lang="en-US" sz="1050" b="1" dirty="0">
                 <a:solidFill>
                   <a:srgbClr val="1F2733"/>
                 </a:solidFill>
@@ -1687,38 +2658,38 @@
                 <a:ea typeface="Arial" pitchFamily="34" charset="-122"/>
                 <a:cs typeface="Arial" pitchFamily="34" charset="-120"/>
               </a:rPr>
-              <a:t>Prompt</a:t>
-            </a:r>
-            <a:endParaRPr lang="en-US" sz="1250" dirty="0"/>
-          </a:p>
-        </p:txBody>
-      </p:sp>
-      <p:sp>
-        <p:nvSpPr>
-          <p:cNvPr id="22" name="Text 20"/>
-          <p:cNvSpPr/>
-          <p:nvPr/>
-        </p:nvSpPr>
-        <p:spPr>
-          <a:xfrm>
-            <a:off x="2880360" y="4846320"/>
-            <a:ext cx="4069080" cy="868680"/>
-          </a:xfrm>
-          <a:prstGeom prst="rect">
-            <a:avLst/>
-          </a:prstGeom>
-          <a:noFill/>
-          <a:ln/>
-        </p:spPr>
-        <p:txBody>
-          <a:bodyPr wrap="square" lIns="0" tIns="0" rIns="0" bIns="0" rtlCol="0" anchor="t"/>
+              <a:t>Reusable Steps / Prompt</a:t>
+            </a:r>
+            <a:endParaRPr lang="en-US" sz="1050" dirty="0"/>
+          </a:p>
+        </p:txBody>
+      </p:sp>
+      <p:sp>
+        <p:nvSpPr>
+          <p:cNvPr id="53" name="Text 51"/>
+          <p:cNvSpPr/>
+          <p:nvPr/>
+        </p:nvSpPr>
+        <p:spPr>
+          <a:xfrm>
+            <a:off x="2395728" y="5173675"/>
+            <a:ext cx="4480560" cy="318211"/>
+          </a:xfrm>
+          <a:prstGeom prst="rect">
+            <a:avLst/>
+          </a:prstGeom>
+          <a:noFill/>
+          <a:ln/>
+        </p:spPr>
+        <p:txBody>
+          <a:bodyPr wrap="square" lIns="0" tIns="0" rIns="0" bIns="0" rtlCol="0" anchor="ctr"/>
           <a:lstStyle/>
           <a:p>
             <a:pPr indent="0" marL="0">
               <a:buNone/>
             </a:pPr>
             <a:r>
-              <a:rPr lang="en-US" sz="1200" i="1" dirty="0">
+              <a:rPr lang="en-US" sz="1050" i="1" dirty="0">
                 <a:solidFill>
                   <a:srgbClr val="9A5B5B"/>
                 </a:solidFill>
@@ -1726,38 +2697,38 @@
                 <a:ea typeface="Arial" pitchFamily="34" charset="-122"/>
                 <a:cs typeface="Arial" pitchFamily="34" charset="-120"/>
               </a:rPr>
-              <a:t>(left blank)</a:t>
-            </a:r>
-            <a:endParaRPr lang="en-US" sz="1200" dirty="0"/>
-          </a:p>
-        </p:txBody>
-      </p:sp>
-      <p:sp>
-        <p:nvSpPr>
-          <p:cNvPr id="23" name="Text 21"/>
-          <p:cNvSpPr/>
-          <p:nvPr/>
-        </p:nvSpPr>
-        <p:spPr>
-          <a:xfrm>
-            <a:off x="7406640" y="4846320"/>
-            <a:ext cx="4069080" cy="868680"/>
-          </a:xfrm>
-          <a:prstGeom prst="rect">
-            <a:avLst/>
-          </a:prstGeom>
-          <a:noFill/>
-          <a:ln/>
-        </p:spPr>
-        <p:txBody>
-          <a:bodyPr wrap="square" lIns="0" tIns="0" rIns="0" bIns="0" rtlCol="0" anchor="t"/>
+              <a:t>(blank)</a:t>
+            </a:r>
+            <a:endParaRPr lang="en-US" sz="1050" dirty="0"/>
+          </a:p>
+        </p:txBody>
+      </p:sp>
+      <p:sp>
+        <p:nvSpPr>
+          <p:cNvPr id="54" name="Text 52"/>
+          <p:cNvSpPr/>
+          <p:nvPr/>
+        </p:nvSpPr>
+        <p:spPr>
+          <a:xfrm>
+            <a:off x="7205472" y="5173675"/>
+            <a:ext cx="4480560" cy="318211"/>
+          </a:xfrm>
+          <a:prstGeom prst="rect">
+            <a:avLst/>
+          </a:prstGeom>
+          <a:noFill/>
+          <a:ln/>
+        </p:spPr>
+        <p:txBody>
+          <a:bodyPr wrap="square" lIns="0" tIns="0" rIns="0" bIns="0" rtlCol="0" anchor="ctr"/>
           <a:lstStyle/>
           <a:p>
             <a:pPr indent="0" marL="0">
               <a:buNone/>
             </a:pPr>
             <a:r>
-              <a:rPr lang="en-US" sz="1200" dirty="0">
+              <a:rPr lang="en-US" sz="1050" dirty="0">
                 <a:solidFill>
                   <a:srgbClr val="1F2733"/>
                 </a:solidFill>
@@ -1765,26 +2736,166 @@
                 <a:ea typeface="Arial" pitchFamily="34" charset="-122"/>
                 <a:cs typeface="Arial" pitchFamily="34" charset="-120"/>
               </a:rPr>
-              <a:t>“Summarize these notes into: (1) decisions, (2) action items with owners, (3) open questions. Under half a page.”</a:t>
-            </a:r>
-            <a:endParaRPr lang="en-US" sz="1200" dirty="0"/>
-          </a:p>
-        </p:txBody>
-      </p:sp>
-      <p:sp>
-        <p:nvSpPr>
-          <p:cNvPr id="24" name="Text 22"/>
-          <p:cNvSpPr/>
-          <p:nvPr/>
-        </p:nvSpPr>
-        <p:spPr>
-          <a:xfrm>
-            <a:off x="457200" y="5989320"/>
-            <a:ext cx="11274552" cy="566928"/>
+              <a:t>“Summarize into decisions, actions + owners, open Qs”</a:t>
+            </a:r>
+            <a:endParaRPr lang="en-US" sz="1050" dirty="0"/>
+          </a:p>
+        </p:txBody>
+      </p:sp>
+      <p:sp>
+        <p:nvSpPr>
+          <p:cNvPr id="55" name="Shape 53"/>
+          <p:cNvSpPr/>
+          <p:nvPr/>
+        </p:nvSpPr>
+        <p:spPr>
+          <a:xfrm>
+            <a:off x="365760" y="5482742"/>
+            <a:ext cx="11430000" cy="0"/>
+          </a:xfrm>
+          <a:prstGeom prst="line">
+            <a:avLst/>
+          </a:prstGeom>
+          <a:noFill/>
+          <a:ln w="9525">
+            <a:solidFill>
+              <a:srgbClr val="EEF0F3"/>
+            </a:solidFill>
+            <a:prstDash val="solid"/>
+          </a:ln>
+        </p:spPr>
+      </p:sp>
+      <p:sp>
+        <p:nvSpPr>
+          <p:cNvPr id="56" name="Text 54"/>
+          <p:cNvSpPr/>
+          <p:nvPr/>
+        </p:nvSpPr>
+        <p:spPr>
+          <a:xfrm>
+            <a:off x="320040" y="5491886"/>
+            <a:ext cx="1847088" cy="318211"/>
+          </a:xfrm>
+          <a:prstGeom prst="rect">
+            <a:avLst/>
+          </a:prstGeom>
+          <a:noFill/>
+          <a:ln/>
+        </p:spPr>
+        <p:txBody>
+          <a:bodyPr wrap="square" lIns="0" tIns="0" rIns="0" bIns="0" rtlCol="0" anchor="ctr"/>
+          <a:lstStyle/>
+          <a:p>
+            <a:pPr algn="r" indent="0" marL="0">
+              <a:buNone/>
+            </a:pPr>
+            <a:r>
+              <a:rPr lang="en-US" sz="1050" b="1" dirty="0">
+                <a:solidFill>
+                  <a:srgbClr val="1F2733"/>
+                </a:solidFill>
+                <a:latin typeface="Arial" pitchFamily="34" charset="0"/>
+                <a:ea typeface="Arial" pitchFamily="34" charset="-122"/>
+                <a:cs typeface="Arial" pitchFamily="34" charset="-120"/>
+              </a:rPr>
+              <a:t>Attachments</a:t>
+            </a:r>
+            <a:endParaRPr lang="en-US" sz="1050" dirty="0"/>
+          </a:p>
+        </p:txBody>
+      </p:sp>
+      <p:sp>
+        <p:nvSpPr>
+          <p:cNvPr id="57" name="Text 55"/>
+          <p:cNvSpPr/>
+          <p:nvPr/>
+        </p:nvSpPr>
+        <p:spPr>
+          <a:xfrm>
+            <a:off x="2395728" y="5491886"/>
+            <a:ext cx="4480560" cy="318211"/>
+          </a:xfrm>
+          <a:prstGeom prst="rect">
+            <a:avLst/>
+          </a:prstGeom>
+          <a:noFill/>
+          <a:ln/>
+        </p:spPr>
+        <p:txBody>
+          <a:bodyPr wrap="square" lIns="0" tIns="0" rIns="0" bIns="0" rtlCol="0" anchor="ctr"/>
+          <a:lstStyle/>
+          <a:p>
+            <a:pPr indent="0" marL="0">
+              <a:buNone/>
+            </a:pPr>
+            <a:r>
+              <a:rPr lang="en-US" sz="1050" i="1" dirty="0">
+                <a:solidFill>
+                  <a:srgbClr val="9A5B5B"/>
+                </a:solidFill>
+                <a:latin typeface="Arial" pitchFamily="34" charset="0"/>
+                <a:ea typeface="Arial" pitchFamily="34" charset="-122"/>
+                <a:cs typeface="Arial" pitchFamily="34" charset="-120"/>
+              </a:rPr>
+              <a:t>none</a:t>
+            </a:r>
+            <a:endParaRPr lang="en-US" sz="1050" dirty="0"/>
+          </a:p>
+        </p:txBody>
+      </p:sp>
+      <p:sp>
+        <p:nvSpPr>
+          <p:cNvPr id="58" name="Text 56"/>
+          <p:cNvSpPr/>
+          <p:nvPr/>
+        </p:nvSpPr>
+        <p:spPr>
+          <a:xfrm>
+            <a:off x="7205472" y="5491886"/>
+            <a:ext cx="4480560" cy="318211"/>
+          </a:xfrm>
+          <a:prstGeom prst="rect">
+            <a:avLst/>
+          </a:prstGeom>
+          <a:noFill/>
+          <a:ln/>
+        </p:spPr>
+        <p:txBody>
+          <a:bodyPr wrap="square" lIns="0" tIns="0" rIns="0" bIns="0" rtlCol="0" anchor="ctr"/>
+          <a:lstStyle/>
+          <a:p>
+            <a:pPr indent="0" marL="0">
+              <a:buNone/>
+            </a:pPr>
+            <a:r>
+              <a:rPr lang="en-US" sz="1050" dirty="0">
+                <a:solidFill>
+                  <a:srgbClr val="1F2733"/>
+                </a:solidFill>
+                <a:latin typeface="Arial" pitchFamily="34" charset="0"/>
+                <a:ea typeface="Arial" pitchFamily="34" charset="-122"/>
+                <a:cs typeface="Arial" pitchFamily="34" charset="-120"/>
+              </a:rPr>
+              <a:t>Sanitized notes + output example</a:t>
+            </a:r>
+            <a:endParaRPr lang="en-US" sz="1050" dirty="0"/>
+          </a:p>
+        </p:txBody>
+      </p:sp>
+      <p:sp>
+        <p:nvSpPr>
+          <p:cNvPr id="59" name="Text 57"/>
+          <p:cNvSpPr/>
+          <p:nvPr/>
+        </p:nvSpPr>
+        <p:spPr>
+          <a:xfrm>
+            <a:off x="365760" y="5998464"/>
+            <a:ext cx="11457432" cy="457200"/>
           </a:xfrm>
           <a:prstGeom prst="roundRect">
             <a:avLst>
-              <a:gd name="adj" fmla="val 12903"/>
+              <a:gd name="adj" fmla="val 12000"/>
             </a:avLst>
           </a:prstGeom>
           <a:solidFill>
@@ -1800,7 +2911,7 @@
               <a:buNone/>
             </a:pPr>
             <a:r>
-              <a:rPr lang="en-US" sz="1350" dirty="0">
+              <a:rPr lang="en-US" sz="1250" dirty="0">
                 <a:solidFill>
                   <a:srgbClr val="FFFFFF"/>
                 </a:solidFill>
@@ -1814,7 +2925,7 @@
               <a:buNone/>
             </a:pPr>
             <a:r>
-              <a:rPr lang="en-US" sz="1350" b="1" dirty="0">
+              <a:rPr lang="en-US" sz="1250" b="1" dirty="0">
                 <a:solidFill>
                   <a:srgbClr val="FFFFFF"/>
                 </a:solidFill>
@@ -1828,7 +2939,7 @@
               <a:buNone/>
             </a:pPr>
             <a:r>
-              <a:rPr lang="en-US" sz="1350" dirty="0">
+              <a:rPr lang="en-US" sz="1250" dirty="0">
                 <a:solidFill>
                   <a:srgbClr val="FFFFFF"/>
                 </a:solidFill>
@@ -1842,7 +2953,7 @@
               <a:buNone/>
             </a:pPr>
             <a:r>
-              <a:rPr lang="en-US" sz="1350" b="1" dirty="0">
+              <a:rPr lang="en-US" sz="1250" b="1" dirty="0">
                 <a:solidFill>
                   <a:srgbClr val="FFFFFF"/>
                 </a:solidFill>
@@ -1856,7 +2967,7 @@
               <a:buNone/>
             </a:pPr>
             <a:r>
-              <a:rPr lang="en-US" sz="1350" dirty="0">
+              <a:rPr lang="en-US" sz="1250" dirty="0">
                 <a:solidFill>
                   <a:srgbClr val="FFFFFF"/>
                 </a:solidFill>
@@ -1870,7 +2981,7 @@
               <a:buNone/>
             </a:pPr>
             <a:r>
-              <a:rPr lang="en-US" sz="1350" b="1" dirty="0">
+              <a:rPr lang="en-US" sz="1250" b="1" dirty="0">
                 <a:solidFill>
                   <a:srgbClr val="FFFFFF"/>
                 </a:solidFill>
@@ -1884,7 +2995,7 @@
               <a:buNone/>
             </a:pPr>
             <a:r>
-              <a:rPr lang="en-US" sz="1350" dirty="0">
+              <a:rPr lang="en-US" sz="1250" dirty="0">
                 <a:solidFill>
                   <a:srgbClr val="FFFFFF"/>
                 </a:solidFill>
@@ -1894,20 +3005,20 @@
               </a:rPr>
               <a:t> by someone who wasn't in the room.</a:t>
             </a:r>
-            <a:endParaRPr lang="en-US" sz="1350" dirty="0"/>
-          </a:p>
-        </p:txBody>
-      </p:sp>
-      <p:sp>
-        <p:nvSpPr>
-          <p:cNvPr id="25" name="Text 23"/>
-          <p:cNvSpPr/>
-          <p:nvPr/>
-        </p:nvSpPr>
-        <p:spPr>
-          <a:xfrm>
-            <a:off x="457200" y="6620256"/>
-            <a:ext cx="11274552" cy="201168"/>
+            <a:endParaRPr lang="en-US" sz="1250" dirty="0"/>
+          </a:p>
+        </p:txBody>
+      </p:sp>
+      <p:sp>
+        <p:nvSpPr>
+          <p:cNvPr id="60" name="Text 58"/>
+          <p:cNvSpPr/>
+          <p:nvPr/>
+        </p:nvSpPr>
+        <p:spPr>
+          <a:xfrm>
+            <a:off x="365760" y="6547104"/>
+            <a:ext cx="11457432" cy="182880"/>
           </a:xfrm>
           <a:prstGeom prst="rect">
             <a:avLst/>
